--- a/module-05-dijkstra/slides/08-building-experience.pptx
+++ b/module-05-dijkstra/slides/08-building-experience.pptx
@@ -3172,7 +3172,7 @@
               </a:defRPr>
             </a:pPr>
             <a:r>
-              <a:t>Module 5: Dijkstra's Algorithm</a:t>
+              <a:t>Module 5: Dijkstra</a:t>
             </a:r>
           </a:p>
         </p:txBody>
@@ -3720,7 +3720,7 @@
                         </a:defRPr>
                       </a:pPr>
                       <a:r>
-                        <a:t>FileNotFoundError</a:t>
+                        <a:t>`FileNotFoundError`</a:t>
                       </a:r>
                     </a:p>
                   </a:txBody>
@@ -3737,7 +3737,7 @@
                         </a:defRPr>
                       </a:pPr>
                       <a:r>
-                        <a:t>Use try/except to start with empty list</a:t>
+                        <a:t>Use `try/except` to start with empty list</a:t>
                       </a:r>
                     </a:p>
                   </a:txBody>
@@ -3855,7 +3855,7 @@
                         </a:defRPr>
                       </a:pPr>
                       <a:r>
-                        <a:t>Check if node not in blocked_nodes before adding</a:t>
+                        <a:t>Check `if node not in blocked_nodes` before adding</a:t>
                       </a:r>
                     </a:p>
                   </a:txBody>
@@ -3895,7 +3895,7 @@
                         </a:defRPr>
                       </a:pPr>
                       <a:r>
-                        <a:t>load_obstacles crashes</a:t>
+                        <a:t>`load_obstacles` crashes</a:t>
                       </a:r>
                     </a:p>
                   </a:txBody>
@@ -4842,7 +4842,7 @@
         </p:nvSpPr>
         <p:spPr>
           <a:xfrm>
-            <a:off x="548640" y="1371600"/>
+            <a:off x="548640" y="2377440"/>
             <a:ext cx="10972800" cy="1188720"/>
           </a:xfrm>
           <a:prstGeom prst="roundRect">
@@ -4887,7 +4887,7 @@
         </p:nvSpPr>
         <p:spPr>
           <a:xfrm>
-            <a:off x="731520" y="1463040"/>
+            <a:off x="731520" y="2468880"/>
             <a:ext cx="10607040" cy="1005840"/>
           </a:xfrm>
           <a:prstGeom prst="rect">
@@ -4905,7 +4905,7 @@
               <a:spcAft>
                 <a:spcPts val="100"/>
               </a:spcAft>
-              <a:defRPr sz="1300">
+              <a:defRPr sz="1800">
                 <a:solidFill>
                   <a:srgbClr val="333333"/>
                 </a:solidFill>
@@ -4921,7 +4921,7 @@
               <a:spcAft>
                 <a:spcPts val="100"/>
               </a:spcAft>
-              <a:defRPr sz="1300">
+              <a:defRPr sz="1800">
                 <a:solidFill>
                   <a:srgbClr val="333333"/>
                 </a:solidFill>
@@ -4937,7 +4937,7 @@
               <a:spcAft>
                 <a:spcPts val="100"/>
               </a:spcAft>
-              <a:defRPr sz="1300">
+              <a:defRPr sz="1800">
                 <a:solidFill>
                   <a:srgbClr val="333333"/>
                 </a:solidFill>
@@ -4953,7 +4953,7 @@
               <a:spcAft>
                 <a:spcPts val="100"/>
               </a:spcAft>
-              <a:defRPr sz="1300">
+              <a:defRPr sz="1800">
                 <a:solidFill>
                   <a:srgbClr val="333333"/>
                 </a:solidFill>
@@ -4974,7 +4974,7 @@
         </p:nvSpPr>
         <p:spPr>
           <a:xfrm>
-            <a:off x="548640" y="2697480"/>
+            <a:off x="548640" y="3703320"/>
             <a:ext cx="10972800" cy="365760"/>
           </a:xfrm>
           <a:prstGeom prst="rect">
@@ -5074,8 +5074,8 @@
         </p:nvSpPr>
         <p:spPr>
           <a:xfrm>
-            <a:off x="548640" y="2697480"/>
-            <a:ext cx="10972800" cy="1188720"/>
+            <a:off x="548640" y="4526280"/>
+            <a:ext cx="10972800" cy="960120"/>
           </a:xfrm>
           <a:prstGeom prst="roundRect">
             <a:avLst/>
@@ -5119,8 +5119,8 @@
         </p:nvSpPr>
         <p:spPr>
           <a:xfrm>
-            <a:off x="731520" y="2788920"/>
-            <a:ext cx="10607040" cy="1005840"/>
+            <a:off x="731520" y="4617720"/>
+            <a:ext cx="10607040" cy="777240"/>
           </a:xfrm>
           <a:prstGeom prst="rect">
             <a:avLst/>
@@ -5137,7 +5137,7 @@
               <a:spcAft>
                 <a:spcPts val="100"/>
               </a:spcAft>
-              <a:defRPr sz="1300">
+              <a:defRPr sz="1800">
                 <a:solidFill>
                   <a:srgbClr val="333333"/>
                 </a:solidFill>
@@ -5153,7 +5153,7 @@
               <a:spcAft>
                 <a:spcPts val="100"/>
               </a:spcAft>
-              <a:defRPr sz="1300">
+              <a:defRPr sz="1800">
                 <a:solidFill>
                   <a:srgbClr val="333333"/>
                 </a:solidFill>
@@ -5169,7 +5169,7 @@
               <a:spcAft>
                 <a:spcPts val="100"/>
               </a:spcAft>
-              <a:defRPr sz="1300">
+              <a:defRPr sz="1800">
                 <a:solidFill>
                   <a:srgbClr val="333333"/>
                 </a:solidFill>
@@ -5185,7 +5185,7 @@
               <a:spcAft>
                 <a:spcPts val="100"/>
               </a:spcAft>
-              <a:defRPr sz="1300">
+              <a:defRPr sz="1800">
                 <a:solidFill>
                   <a:srgbClr val="333333"/>
                 </a:solidFill>
@@ -5498,7 +5498,7 @@
               <a:spcAft>
                 <a:spcPts val="100"/>
               </a:spcAft>
-              <a:defRPr sz="1300">
+              <a:defRPr sz="1800">
                 <a:solidFill>
                   <a:srgbClr val="333333"/>
                 </a:solidFill>
@@ -5514,7 +5514,7 @@
               <a:spcAft>
                 <a:spcPts val="100"/>
               </a:spcAft>
-              <a:defRPr sz="1300">
+              <a:defRPr sz="1800">
                 <a:solidFill>
                   <a:srgbClr val="333333"/>
                 </a:solidFill>
@@ -5530,7 +5530,7 @@
               <a:spcAft>
                 <a:spcPts val="100"/>
               </a:spcAft>
-              <a:defRPr sz="1300">
+              <a:defRPr sz="1800">
                 <a:solidFill>
                   <a:srgbClr val="333333"/>
                 </a:solidFill>
@@ -5543,7 +5543,7 @@
               <a:spcAft>
                 <a:spcPts val="100"/>
               </a:spcAft>
-              <a:defRPr sz="1300">
+              <a:defRPr sz="1800">
                 <a:solidFill>
                   <a:srgbClr val="333333"/>
                 </a:solidFill>
@@ -5559,7 +5559,7 @@
               <a:spcAft>
                 <a:spcPts val="100"/>
               </a:spcAft>
-              <a:defRPr sz="1300">
+              <a:defRPr sz="1800">
                 <a:solidFill>
                   <a:srgbClr val="333333"/>
                 </a:solidFill>
@@ -5575,7 +5575,7 @@
               <a:spcAft>
                 <a:spcPts val="100"/>
               </a:spcAft>
-              <a:defRPr sz="1300">
+              <a:defRPr sz="1800">
                 <a:solidFill>
                   <a:srgbClr val="333333"/>
                 </a:solidFill>
@@ -5583,7 +5583,7 @@
               </a:defRPr>
             </a:pPr>
             <a:r>
-              <a:t>pathfinder = Dijkstra((0, 0), blocked_nodes)  # Start smart!</a:t>
+              <a:t>graph = build_dijkstra_graph(rows, cols, blocked_nodes)  # Start smart!</a:t>
             </a:r>
           </a:p>
         </p:txBody>
@@ -5912,7 +5912,7 @@
               <a:spcAft>
                 <a:spcPts val="100"/>
               </a:spcAft>
-              <a:defRPr sz="1300">
+              <a:defRPr sz="1800">
                 <a:solidFill>
                   <a:srgbClr val="333333"/>
                 </a:solidFill>
@@ -5928,7 +5928,7 @@
               <a:spcAft>
                 <a:spcPts val="100"/>
               </a:spcAft>
-              <a:defRPr sz="1300">
+              <a:defRPr sz="1800">
                 <a:solidFill>
                   <a:srgbClr val="333333"/>
                 </a:solidFill>
@@ -5944,7 +5944,7 @@
               <a:spcAft>
                 <a:spcPts val="100"/>
               </a:spcAft>
-              <a:defRPr sz="1300">
+              <a:defRPr sz="1800">
                 <a:solidFill>
                   <a:srgbClr val="333333"/>
                 </a:solidFill>
@@ -5960,7 +5960,7 @@
               <a:spcAft>
                 <a:spcPts val="100"/>
               </a:spcAft>
-              <a:defRPr sz="1300">
+              <a:defRPr sz="1800">
                 <a:solidFill>
                   <a:srgbClr val="333333"/>
                 </a:solidFill>
@@ -5976,7 +5976,7 @@
               <a:spcAft>
                 <a:spcPts val="100"/>
               </a:spcAft>
-              <a:defRPr sz="1300">
+              <a:defRPr sz="1800">
                 <a:solidFill>
                   <a:srgbClr val="333333"/>
                 </a:solidFill>
@@ -5992,7 +5992,7 @@
               <a:spcAft>
                 <a:spcPts val="100"/>
               </a:spcAft>
-              <a:defRPr sz="1300">
+              <a:defRPr sz="1800">
                 <a:solidFill>
                   <a:srgbClr val="333333"/>
                 </a:solidFill>
@@ -6008,7 +6008,7 @@
               <a:spcAft>
                 <a:spcPts val="100"/>
               </a:spcAft>
-              <a:defRPr sz="1300">
+              <a:defRPr sz="1800">
                 <a:solidFill>
                   <a:srgbClr val="333333"/>
                 </a:solidFill>
@@ -6024,7 +6024,7 @@
               <a:spcAft>
                 <a:spcPts val="100"/>
               </a:spcAft>
-              <a:defRPr sz="1300">
+              <a:defRPr sz="1800">
                 <a:solidFill>
                   <a:srgbClr val="333333"/>
                 </a:solidFill>
@@ -6108,7 +6108,7 @@
               <a:spcAft>
                 <a:spcPts val="100"/>
               </a:spcAft>
-              <a:defRPr sz="1300">
+              <a:defRPr sz="1800">
                 <a:solidFill>
                   <a:srgbClr val="333333"/>
                 </a:solidFill>
@@ -6124,7 +6124,7 @@
               <a:spcAft>
                 <a:spcPts val="100"/>
               </a:spcAft>
-              <a:defRPr sz="1300">
+              <a:defRPr sz="1800">
                 <a:solidFill>
                   <a:srgbClr val="333333"/>
                 </a:solidFill>
@@ -6140,7 +6140,7 @@
               <a:spcAft>
                 <a:spcPts val="100"/>
               </a:spcAft>
-              <a:defRPr sz="1300">
+              <a:defRPr sz="1800">
                 <a:solidFill>
                   <a:srgbClr val="333333"/>
                 </a:solidFill>
@@ -6311,7 +6311,7 @@
         <p:spPr>
           <a:xfrm>
             <a:off x="548640" y="1371600"/>
-            <a:ext cx="10972800" cy="2743200"/>
+            <a:ext cx="10972800" cy="3474720"/>
           </a:xfrm>
           <a:prstGeom prst="roundRect">
             <a:avLst/>
@@ -6356,7 +6356,7 @@
         <p:spPr>
           <a:xfrm>
             <a:off x="731520" y="1463040"/>
-            <a:ext cx="10607040" cy="2560320"/>
+            <a:ext cx="10607040" cy="3291840"/>
           </a:xfrm>
           <a:prstGeom prst="rect">
             <a:avLst/>
@@ -6373,7 +6373,7 @@
               <a:spcAft>
                 <a:spcPts val="100"/>
               </a:spcAft>
-              <a:defRPr sz="1300">
+              <a:defRPr sz="1800">
                 <a:solidFill>
                   <a:srgbClr val="333333"/>
                 </a:solidFill>
@@ -6389,7 +6389,7 @@
               <a:spcAft>
                 <a:spcPts val="100"/>
               </a:spcAft>
-              <a:defRPr sz="1300">
+              <a:defRPr sz="1800">
                 <a:solidFill>
                   <a:srgbClr val="333333"/>
                 </a:solidFill>
@@ -6405,7 +6405,7 @@
               <a:spcAft>
                 <a:spcPts val="100"/>
               </a:spcAft>
-              <a:defRPr sz="1300">
+              <a:defRPr sz="1800">
                 <a:solidFill>
                   <a:srgbClr val="333333"/>
                 </a:solidFill>
@@ -6421,7 +6421,7 @@
               <a:spcAft>
                 <a:spcPts val="100"/>
               </a:spcAft>
-              <a:defRPr sz="1300">
+              <a:defRPr sz="1800">
                 <a:solidFill>
                   <a:srgbClr val="333333"/>
                 </a:solidFill>
@@ -6437,7 +6437,7 @@
               <a:spcAft>
                 <a:spcPts val="100"/>
               </a:spcAft>
-              <a:defRPr sz="1300">
+              <a:defRPr sz="1800">
                 <a:solidFill>
                   <a:srgbClr val="333333"/>
                 </a:solidFill>
@@ -6453,7 +6453,7 @@
               <a:spcAft>
                 <a:spcPts val="100"/>
               </a:spcAft>
-              <a:defRPr sz="1300">
+              <a:defRPr sz="1800">
                 <a:solidFill>
                   <a:srgbClr val="333333"/>
                 </a:solidFill>
@@ -6469,7 +6469,7 @@
               <a:spcAft>
                 <a:spcPts val="100"/>
               </a:spcAft>
-              <a:defRPr sz="1300">
+              <a:defRPr sz="1800">
                 <a:solidFill>
                   <a:srgbClr val="333333"/>
                 </a:solidFill>
@@ -6485,7 +6485,7 @@
               <a:spcAft>
                 <a:spcPts val="100"/>
               </a:spcAft>
-              <a:defRPr sz="1300">
+              <a:defRPr sz="1800">
                 <a:solidFill>
                   <a:srgbClr val="333333"/>
                 </a:solidFill>
@@ -6501,7 +6501,7 @@
               <a:spcAft>
                 <a:spcPts val="100"/>
               </a:spcAft>
-              <a:defRPr sz="1300">
+              <a:defRPr sz="1800">
                 <a:solidFill>
                   <a:srgbClr val="333333"/>
                 </a:solidFill>
@@ -6517,7 +6517,7 @@
               <a:spcAft>
                 <a:spcPts val="100"/>
               </a:spcAft>
-              <a:defRPr sz="1300">
+              <a:defRPr sz="1800">
                 <a:solidFill>
                   <a:srgbClr val="333333"/>
                 </a:solidFill>
@@ -6533,7 +6533,7 @@
               <a:spcAft>
                 <a:spcPts val="100"/>
               </a:spcAft>
-              <a:defRPr sz="1300">
+              <a:defRPr sz="1800">
                 <a:solidFill>
                   <a:srgbClr val="333333"/>
                 </a:solidFill>
@@ -6549,7 +6549,7 @@
               <a:spcAft>
                 <a:spcPts val="100"/>
               </a:spcAft>
-              <a:defRPr sz="1300">
+              <a:defRPr sz="1800">
                 <a:solidFill>
                   <a:srgbClr val="333333"/>
                 </a:solidFill>
@@ -6565,7 +6565,7 @@
               <a:spcAft>
                 <a:spcPts val="100"/>
               </a:spcAft>
-              <a:defRPr sz="1300">
+              <a:defRPr sz="1800">
                 <a:solidFill>
                   <a:srgbClr val="333333"/>
                 </a:solidFill>
@@ -6581,7 +6581,7 @@
               <a:spcAft>
                 <a:spcPts val="100"/>
               </a:spcAft>
-              <a:defRPr sz="1300">
+              <a:defRPr sz="1800">
                 <a:solidFill>
                   <a:srgbClr val="333333"/>
                 </a:solidFill>
@@ -6602,7 +6602,7 @@
         </p:nvSpPr>
         <p:spPr>
           <a:xfrm>
-            <a:off x="548640" y="4251960"/>
+            <a:off x="548640" y="4983480"/>
             <a:ext cx="10972800" cy="365760"/>
           </a:xfrm>
           <a:prstGeom prst="rect">
@@ -6633,278 +6633,6 @@
           </a:p>
         </p:txBody>
       </p:sp>
-      <p:graphicFrame>
-        <p:nvGraphicFramePr>
-          <p:cNvPr id="8" name="Table 7"/>
-          <p:cNvGraphicFramePr>
-            <a:graphicFrameLocks noGrp="1"/>
-          </p:cNvGraphicFramePr>
-          <p:nvPr/>
-        </p:nvGraphicFramePr>
-        <p:xfrm>
-          <a:off x="914400" y="4251960"/>
-          <a:ext cx="10058400" cy="2194560"/>
-        </p:xfrm>
-        <a:graphic>
-          <a:graphicData uri="http://schemas.openxmlformats.org/drawingml/2006/table">
-            <a:tbl>
-              <a:tblPr firstRow="1" bandRow="1">
-                <a:tableStyleId>{5C22544A-7EE6-4342-B048-85BDC9FD1C3A}</a:tableStyleId>
-              </a:tblPr>
-              <a:tblGrid>
-                <a:gridCol w="5029200"/>
-                <a:gridCol w="5029200"/>
-              </a:tblGrid>
-              <a:tr h="365760">
-                <a:tc>
-                  <a:txBody>
-                    <a:bodyPr/>
-                    <a:lstStyle/>
-                    <a:p>
-                      <a:pPr algn="ctr">
-                        <a:defRPr sz="1400" b="1">
-                          <a:solidFill>
-                            <a:srgbClr val="FFFFFF"/>
-                          </a:solidFill>
-                          <a:latin typeface="Calibri"/>
-                        </a:defRPr>
-                      </a:pPr>
-                      <a:r>
-                        <a:t>Concept</a:t>
-                      </a:r>
-                    </a:p>
-                  </a:txBody>
-                  <a:tcPr>
-                    <a:solidFill>
-                      <a:srgbClr val="2E75B6"/>
-                    </a:solidFill>
-                  </a:tcPr>
-                </a:tc>
-                <a:tc>
-                  <a:txBody>
-                    <a:bodyPr/>
-                    <a:lstStyle/>
-                    <a:p>
-                      <a:pPr algn="ctr">
-                        <a:defRPr sz="1400" b="1">
-                          <a:solidFill>
-                            <a:srgbClr val="FFFFFF"/>
-                          </a:solidFill>
-                          <a:latin typeface="Calibri"/>
-                        </a:defRPr>
-                      </a:pPr>
-                      <a:r>
-                        <a:t>Explanation</a:t>
-                      </a:r>
-                    </a:p>
-                  </a:txBody>
-                  <a:tcPr>
-                    <a:solidFill>
-                      <a:srgbClr val="2E75B6"/>
-                    </a:solidFill>
-                  </a:tcPr>
-                </a:tc>
-              </a:tr>
-              <a:tr h="365760">
-                <a:tc>
-                  <a:txBody>
-                    <a:bodyPr/>
-                    <a:lstStyle/>
-                    <a:p>
-                      <a:pPr algn="ctr">
-                        <a:defRPr sz="1300">
-                          <a:latin typeface="Calibri"/>
-                        </a:defRPr>
-                      </a:pPr>
-                      <a:r>
-                        <a:t>open("obstacles.txt", "r")</a:t>
-                      </a:r>
-                    </a:p>
-                  </a:txBody>
-                  <a:tcPr/>
-                </a:tc>
-                <a:tc>
-                  <a:txBody>
-                    <a:bodyPr/>
-                    <a:lstStyle/>
-                    <a:p>
-                      <a:pPr algn="ctr">
-                        <a:defRPr sz="1300">
-                          <a:latin typeface="Calibri"/>
-                        </a:defRPr>
-                      </a:pPr>
-                      <a:r>
-                        <a:t>Opens file for reading ("r" = read mode)</a:t>
-                      </a:r>
-                    </a:p>
-                  </a:txBody>
-                  <a:tcPr/>
-                </a:tc>
-              </a:tr>
-              <a:tr h="365760">
-                <a:tc>
-                  <a:txBody>
-                    <a:bodyPr/>
-                    <a:lstStyle/>
-                    <a:p>
-                      <a:pPr algn="ctr">
-                        <a:defRPr sz="1300">
-                          <a:latin typeface="Calibri"/>
-                        </a:defRPr>
-                      </a:pPr>
-                      <a:r>
-                        <a:t>line.strip()</a:t>
-                      </a:r>
-                    </a:p>
-                  </a:txBody>
-                  <a:tcPr>
-                    <a:solidFill>
-                      <a:srgbClr val="E8F0F8"/>
-                    </a:solidFill>
-                  </a:tcPr>
-                </a:tc>
-                <a:tc>
-                  <a:txBody>
-                    <a:bodyPr/>
-                    <a:lstStyle/>
-                    <a:p>
-                      <a:pPr algn="ctr">
-                        <a:defRPr sz="1300">
-                          <a:latin typeface="Calibri"/>
-                        </a:defRPr>
-                      </a:pPr>
-                      <a:r>
-                        <a:t>Removes the newline character from each line</a:t>
-                      </a:r>
-                    </a:p>
-                  </a:txBody>
-                  <a:tcPr>
-                    <a:solidFill>
-                      <a:srgbClr val="E8F0F8"/>
-                    </a:solidFill>
-                  </a:tcPr>
-                </a:tc>
-              </a:tr>
-              <a:tr h="365760">
-                <a:tc>
-                  <a:txBody>
-                    <a:bodyPr/>
-                    <a:lstStyle/>
-                    <a:p>
-                      <a:pPr algn="ctr">
-                        <a:defRPr sz="1300">
-                          <a:latin typeface="Calibri"/>
-                        </a:defRPr>
-                      </a:pPr>
-                      <a:r>
-                        <a:t>line.split(",")</a:t>
-                      </a:r>
-                    </a:p>
-                  </a:txBody>
-                  <a:tcPr/>
-                </a:tc>
-                <a:tc>
-                  <a:txBody>
-                    <a:bodyPr/>
-                    <a:lstStyle/>
-                    <a:p>
-                      <a:pPr algn="ctr">
-                        <a:defRPr sz="1300">
-                          <a:latin typeface="Calibri"/>
-                        </a:defRPr>
-                      </a:pPr>
-                      <a:r>
-                        <a:t>Splits "1,3" into ["1", "3"]</a:t>
-                      </a:r>
-                    </a:p>
-                  </a:txBody>
-                  <a:tcPr/>
-                </a:tc>
-              </a:tr>
-              <a:tr h="365760">
-                <a:tc>
-                  <a:txBody>
-                    <a:bodyPr/>
-                    <a:lstStyle/>
-                    <a:p>
-                      <a:pPr algn="ctr">
-                        <a:defRPr sz="1300">
-                          <a:latin typeface="Calibri"/>
-                        </a:defRPr>
-                      </a:pPr>
-                      <a:r>
-                        <a:t>int(parts[0])</a:t>
-                      </a:r>
-                    </a:p>
-                  </a:txBody>
-                  <a:tcPr>
-                    <a:solidFill>
-                      <a:srgbClr val="E8F0F8"/>
-                    </a:solidFill>
-                  </a:tcPr>
-                </a:tc>
-                <a:tc>
-                  <a:txBody>
-                    <a:bodyPr/>
-                    <a:lstStyle/>
-                    <a:p>
-                      <a:pPr algn="ctr">
-                        <a:defRPr sz="1300">
-                          <a:latin typeface="Calibri"/>
-                        </a:defRPr>
-                      </a:pPr>
-                      <a:r>
-                        <a:t>Converts string "1" to integer 1</a:t>
-                      </a:r>
-                    </a:p>
-                  </a:txBody>
-                  <a:tcPr>
-                    <a:solidFill>
-                      <a:srgbClr val="E8F0F8"/>
-                    </a:solidFill>
-                  </a:tcPr>
-                </a:tc>
-              </a:tr>
-              <a:tr h="365760">
-                <a:tc>
-                  <a:txBody>
-                    <a:bodyPr/>
-                    <a:lstStyle/>
-                    <a:p>
-                      <a:pPr algn="ctr">
-                        <a:defRPr sz="1300">
-                          <a:latin typeface="Calibri"/>
-                        </a:defRPr>
-                      </a:pPr>
-                      <a:r>
-                        <a:t>try / except FileNotFoundError</a:t>
-                      </a:r>
-                    </a:p>
-                  </a:txBody>
-                  <a:tcPr/>
-                </a:tc>
-                <a:tc>
-                  <a:txBody>
-                    <a:bodyPr/>
-                    <a:lstStyle/>
-                    <a:p>
-                      <a:pPr algn="ctr">
-                        <a:defRPr sz="1300">
-                          <a:latin typeface="Calibri"/>
-                        </a:defRPr>
-                      </a:pPr>
-                      <a:r>
-                        <a:t>Handles the case where no file exists yet (first run)</a:t>
-                      </a:r>
-                    </a:p>
-                  </a:txBody>
-                  <a:tcPr/>
-                </a:tc>
-              </a:tr>
-            </a:tbl>
-          </a:graphicData>
-        </a:graphic>
-      </p:graphicFrame>
     </p:spTree>
   </p:cSld>
   <p:clrMapOvr>
@@ -7049,8 +6777,8 @@
         </p:nvSpPr>
         <p:spPr>
           <a:xfrm>
-            <a:off x="548640" y="1371600"/>
-            <a:ext cx="10972800" cy="3200400"/>
+            <a:off x="548640" y="1645920"/>
+            <a:ext cx="10972800" cy="3840480"/>
           </a:xfrm>
           <a:prstGeom prst="roundRect">
             <a:avLst/>
@@ -7094,8 +6822,8 @@
         </p:nvSpPr>
         <p:spPr>
           <a:xfrm>
-            <a:off x="731520" y="1463040"/>
-            <a:ext cx="10607040" cy="3017520"/>
+            <a:off x="731520" y="1737360"/>
+            <a:ext cx="10607040" cy="3657600"/>
           </a:xfrm>
           <a:prstGeom prst="rect">
             <a:avLst/>
@@ -7112,7 +6840,7 @@
               <a:spcAft>
                 <a:spcPts val="100"/>
               </a:spcAft>
-              <a:defRPr sz="1300">
+              <a:defRPr sz="1800">
                 <a:solidFill>
                   <a:srgbClr val="333333"/>
                 </a:solidFill>
@@ -7120,7 +6848,7 @@
               </a:defRPr>
             </a:pPr>
             <a:r>
-              <a:t>from dijkstra import Dijkstra</a:t>
+              <a:t>from dijkstra import build_dijkstra_graph, compute_dijkstra_path</a:t>
             </a:r>
           </a:p>
           <a:p>
@@ -7128,7 +6856,7 @@
               <a:spcAft>
                 <a:spcPts val="100"/>
               </a:spcAft>
-              <a:defRPr sz="1300">
+              <a:defRPr sz="1800">
                 <a:solidFill>
                   <a:srgbClr val="333333"/>
                 </a:solidFill>
@@ -7144,7 +6872,7 @@
               <a:spcAft>
                 <a:spcPts val="100"/>
               </a:spcAft>
-              <a:defRPr sz="1300">
+              <a:defRPr sz="1800">
                 <a:solidFill>
                   <a:srgbClr val="333333"/>
                 </a:solidFill>
@@ -7157,7 +6885,7 @@
               <a:spcAft>
                 <a:spcPts val="100"/>
               </a:spcAft>
-              <a:defRPr sz="1300">
+              <a:defRPr sz="1800">
                 <a:solidFill>
                   <a:srgbClr val="333333"/>
                 </a:solidFill>
@@ -7173,7 +6901,7 @@
               <a:spcAft>
                 <a:spcPts val="100"/>
               </a:spcAft>
-              <a:defRPr sz="1300">
+              <a:defRPr sz="1800">
                 <a:solidFill>
                   <a:srgbClr val="333333"/>
                 </a:solidFill>
@@ -7189,7 +6917,7 @@
               <a:spcAft>
                 <a:spcPts val="100"/>
               </a:spcAft>
-              <a:defRPr sz="1300">
+              <a:defRPr sz="1800">
                 <a:solidFill>
                   <a:srgbClr val="333333"/>
                 </a:solidFill>
@@ -7205,7 +6933,7 @@
               <a:spcAft>
                 <a:spcPts val="100"/>
               </a:spcAft>
-              <a:defRPr sz="1300">
+              <a:defRPr sz="1800">
                 <a:solidFill>
                   <a:srgbClr val="333333"/>
                 </a:solidFill>
@@ -7218,7 +6946,7 @@
               <a:spcAft>
                 <a:spcPts val="100"/>
               </a:spcAft>
-              <a:defRPr sz="1300">
+              <a:defRPr sz="1800">
                 <a:solidFill>
                   <a:srgbClr val="333333"/>
                 </a:solidFill>
@@ -7234,7 +6962,7 @@
               <a:spcAft>
                 <a:spcPts val="100"/>
               </a:spcAft>
-              <a:defRPr sz="1300">
+              <a:defRPr sz="1800">
                 <a:solidFill>
                   <a:srgbClr val="333333"/>
                 </a:solidFill>
@@ -7250,7 +6978,7 @@
               <a:spcAft>
                 <a:spcPts val="100"/>
               </a:spcAft>
-              <a:defRPr sz="1300">
+              <a:defRPr sz="1800">
                 <a:solidFill>
                   <a:srgbClr val="333333"/>
                 </a:solidFill>
@@ -7263,7 +6991,7 @@
               <a:spcAft>
                 <a:spcPts val="100"/>
               </a:spcAft>
-              <a:defRPr sz="1300">
+              <a:defRPr sz="1800">
                 <a:solidFill>
                   <a:srgbClr val="333333"/>
                 </a:solidFill>
@@ -7279,7 +7007,7 @@
               <a:spcAft>
                 <a:spcPts val="100"/>
               </a:spcAft>
-              <a:defRPr sz="1300">
+              <a:defRPr sz="1800">
                 <a:solidFill>
                   <a:srgbClr val="333333"/>
                 </a:solidFill>
@@ -7287,7 +7015,7 @@
               </a:defRPr>
             </a:pPr>
             <a:r>
-              <a:t>    pathfinder = Dijkstra(current, blocked_nodes)</a:t>
+              <a:t>    graph = build_dijkstra_graph(rows, cols, blocked_nodes)</a:t>
             </a:r>
           </a:p>
           <a:p>
@@ -7295,7 +7023,7 @@
               <a:spcAft>
                 <a:spcPts val="100"/>
               </a:spcAft>
-              <a:defRPr sz="1300">
+              <a:defRPr sz="1800">
                 <a:solidFill>
                   <a:srgbClr val="333333"/>
                 </a:solidFill>
@@ -7303,7 +7031,7 @@
               </a:defRPr>
             </a:pPr>
             <a:r>
-              <a:t>    path = pathfinder.compute_path(dest)</a:t>
+              <a:t>    path = compute_dijkstra_path(current, dest, graph)</a:t>
             </a:r>
           </a:p>
           <a:p>
@@ -7311,7 +7039,7 @@
               <a:spcAft>
                 <a:spcPts val="100"/>
               </a:spcAft>
-              <a:defRPr sz="1300">
+              <a:defRPr sz="1800">
                 <a:solidFill>
                   <a:srgbClr val="333333"/>
                 </a:solidFill>
@@ -7327,7 +7055,7 @@
               <a:spcAft>
                 <a:spcPts val="100"/>
               </a:spcAft>
-              <a:defRPr sz="1300">
+              <a:defRPr sz="1800">
                 <a:solidFill>
                   <a:srgbClr val="333333"/>
                 </a:solidFill>
@@ -7343,7 +7071,7 @@
               <a:spcAft>
                 <a:spcPts val="100"/>
               </a:spcAft>
-              <a:defRPr sz="1300">
+              <a:defRPr sz="1800">
                 <a:solidFill>
                   <a:srgbClr val="333333"/>
                 </a:solidFill>
@@ -7359,7 +7087,7 @@
               <a:spcAft>
                 <a:spcPts val="100"/>
               </a:spcAft>
-              <a:defRPr sz="1300">
+              <a:defRPr sz="1800">
                 <a:solidFill>
                   <a:srgbClr val="333333"/>
                 </a:solidFill>
@@ -7372,7 +7100,7 @@
               <a:spcAft>
                 <a:spcPts val="100"/>
               </a:spcAft>
-              <a:defRPr sz="1300">
+              <a:defRPr sz="1800">
                 <a:solidFill>
                   <a:srgbClr val="333333"/>
                 </a:solidFill>
@@ -7388,7 +7116,7 @@
               <a:spcAft>
                 <a:spcPts val="100"/>
               </a:spcAft>
-              <a:defRPr sz="1300">
+              <a:defRPr sz="1800">
                 <a:solidFill>
                   <a:srgbClr val="333333"/>
                 </a:solidFill>
@@ -7409,7 +7137,7 @@
         </p:nvSpPr>
         <p:spPr>
           <a:xfrm>
-            <a:off x="548640" y="4709160"/>
+            <a:off x="548640" y="5623560"/>
             <a:ext cx="10972800" cy="365760"/>
           </a:xfrm>
           <a:prstGeom prst="rect">
@@ -7436,35 +7164,6 @@
             </a:pPr>
             <a:r>
               <a:t>Run 2 — same program, but load_obstacles returns the saved list!</a:t>
-            </a:r>
-          </a:p>
-          <a:p>
-            <a:pPr>
-              <a:spcAft>
-                <a:spcPts val="400"/>
-              </a:spcAft>
-              <a:defRPr sz="400" b="0">
-                <a:solidFill>
-                  <a:srgbClr val="000000"/>
-                </a:solidFill>
-                <a:latin typeface="Calibri"/>
-              </a:defRPr>
-            </a:pPr>
-          </a:p>
-          <a:p>
-            <a:pPr>
-              <a:spcAft>
-                <a:spcPts val="400"/>
-              </a:spcAft>
-              <a:defRPr sz="1700" b="0">
-                <a:solidFill>
-                  <a:srgbClr val="000000"/>
-                </a:solidFill>
-                <a:latin typeface="Calibri"/>
-              </a:defRPr>
-            </a:pPr>
-            <a:r>
-              <a:t>The code is identical. The only difference is what load_obstacles() returns.</a:t>
             </a:r>
           </a:p>
           <a:p>
@@ -7757,7 +7456,7 @@
                         </a:defRPr>
                       </a:pPr>
                       <a:r>
-                        <a:t>[]</a:t>
+                        <a:t>`[]`</a:t>
                       </a:r>
                     </a:p>
                   </a:txBody>
@@ -7774,7 +7473,7 @@
                         </a:defRPr>
                       </a:pPr>
                       <a:r>
-                        <a:t>[(1,1), (2,3)]</a:t>
+                        <a:t>`[(1,1), (2,3)]`</a:t>
                       </a:r>
                     </a:p>
                   </a:txBody>
@@ -8069,7 +7768,7 @@
         <p:spPr>
           <a:xfrm>
             <a:off x="548640" y="3749040"/>
-            <a:ext cx="10972800" cy="1874519"/>
+            <a:ext cx="10972800" cy="1737360"/>
           </a:xfrm>
           <a:prstGeom prst="roundRect">
             <a:avLst/>
@@ -8114,7 +7813,7 @@
         <p:spPr>
           <a:xfrm>
             <a:off x="731520" y="3840480"/>
-            <a:ext cx="10607040" cy="1691639"/>
+            <a:ext cx="10607040" cy="1554480"/>
           </a:xfrm>
           <a:prstGeom prst="rect">
             <a:avLst/>
@@ -8131,7 +7830,7 @@
               <a:spcAft>
                 <a:spcPts val="100"/>
               </a:spcAft>
-              <a:defRPr sz="1300">
+              <a:defRPr sz="1800">
                 <a:solidFill>
                   <a:srgbClr val="333333"/>
                 </a:solidFill>
@@ -8147,7 +7846,7 @@
               <a:spcAft>
                 <a:spcPts val="100"/>
               </a:spcAft>
-              <a:defRPr sz="1300">
+              <a:defRPr sz="1800">
                 <a:solidFill>
                   <a:srgbClr val="333333"/>
                 </a:solidFill>
@@ -8160,7 +7859,7 @@
               <a:spcAft>
                 <a:spcPts val="100"/>
               </a:spcAft>
-              <a:defRPr sz="1300">
+              <a:defRPr sz="1800">
                 <a:solidFill>
                   <a:srgbClr val="333333"/>
                 </a:solidFill>
@@ -8176,7 +7875,7 @@
               <a:spcAft>
                 <a:spcPts val="100"/>
               </a:spcAft>
-              <a:defRPr sz="1300">
+              <a:defRPr sz="1800">
                 <a:solidFill>
                   <a:srgbClr val="333333"/>
                 </a:solidFill>
@@ -8192,7 +7891,7 @@
               <a:spcAft>
                 <a:spcPts val="100"/>
               </a:spcAft>
-              <a:defRPr sz="1300">
+              <a:defRPr sz="1800">
                 <a:solidFill>
                   <a:srgbClr val="333333"/>
                 </a:solidFill>
@@ -8205,7 +7904,7 @@
               <a:spcAft>
                 <a:spcPts val="100"/>
               </a:spcAft>
-              <a:defRPr sz="1300">
+              <a:defRPr sz="1800">
                 <a:solidFill>
                   <a:srgbClr val="333333"/>
                 </a:solidFill>
@@ -8221,7 +7920,7 @@
               <a:spcAft>
                 <a:spcPts val="100"/>
               </a:spcAft>
-              <a:defRPr sz="1300">
+              <a:defRPr sz="1800">
                 <a:solidFill>
                   <a:srgbClr val="333333"/>
                 </a:solidFill>
@@ -8242,7 +7941,7 @@
         </p:nvSpPr>
         <p:spPr>
           <a:xfrm>
-            <a:off x="548640" y="5760719"/>
+            <a:off x="548640" y="5623560"/>
             <a:ext cx="10972800" cy="365760"/>
           </a:xfrm>
           <a:prstGeom prst="rect">
